--- a/viewers/pptx/e2e/fixtures/master-views.pptx
+++ b/viewers/pptx/e2e/fixtures/master-views.pptx
@@ -489,7 +489,7 @@
           <a:spcPct val="20000"/>
         </a:spcBef>
         <a:buFont typeface="Arial" panose="020B0604020202020204" pitchFamily="34" charset="0"/>
-        <a:buChar char="&amp;#x2022;"/>
+        <a:buChar char="•"/>
         <a:defRPr sz="3200" kern="1200">
           <a:solidFill>
             <a:schemeClr val="tx1"/>

--- a/viewers/pptx/e2e/fixtures/master-views.pptx
+++ b/viewers/pptx/e2e/fixtures/master-views.pptx
@@ -545,12 +545,10 @@
           <a:bodyPr wrap="square"/>
           <a:lstStyle/>
           <a:p>
-            <a:pPr/>
             <a:r>
               <a:rPr lang="en-US" dirty="0"/>
               <a:t>MASTER-VIEWS-SLIDE</a:t>
             </a:r>
-            <a:endParaRPr lang="en-US"/>
           </a:p>
         </p:txBody>
       </p:sp>
